--- a/report/Презентация Сидоренко МВ ФИ51 Поиск кратчайшего пути в графе.pptx
+++ b/report/Презентация Сидоренко МВ ФИ51 Поиск кратчайшего пути в графе.pptx
@@ -222,7 +222,7 @@
           <a:p>
             <a:fld id="{F0C118F5-9C1B-4D65-A7FC-9645814C9020}" type="datetimeFigureOut">
               <a:rPr lang="ru-RU" smtClean="0"/>
-              <a:t>03.06.2026</a:t>
+              <a:t>08.06.2026</a:t>
             </a:fld>
             <a:endParaRPr lang="ru-RU"/>
           </a:p>
@@ -752,7 +752,7 @@
           <a:p>
             <a:fld id="{5BCAD085-E8A6-8845-BD4E-CB4CCA059FC4}" type="datetimeFigureOut">
               <a:rPr lang="en-US" smtClean="0"/>
-              <a:t>6/3/2026</a:t>
+              <a:t>6/8/2026</a:t>
             </a:fld>
             <a:endParaRPr lang="en-US"/>
           </a:p>
@@ -920,7 +920,7 @@
           <a:p>
             <a:fld id="{5BCAD085-E8A6-8845-BD4E-CB4CCA059FC4}" type="datetimeFigureOut">
               <a:rPr lang="en-US" smtClean="0"/>
-              <a:t>6/3/2026</a:t>
+              <a:t>6/8/2026</a:t>
             </a:fld>
             <a:endParaRPr lang="en-US"/>
           </a:p>
@@ -1098,7 +1098,7 @@
           <a:p>
             <a:fld id="{5BCAD085-E8A6-8845-BD4E-CB4CCA059FC4}" type="datetimeFigureOut">
               <a:rPr lang="en-US" smtClean="0"/>
-              <a:t>6/3/2026</a:t>
+              <a:t>6/8/2026</a:t>
             </a:fld>
             <a:endParaRPr lang="en-US"/>
           </a:p>
@@ -1266,7 +1266,7 @@
           <a:p>
             <a:fld id="{5BCAD085-E8A6-8845-BD4E-CB4CCA059FC4}" type="datetimeFigureOut">
               <a:rPr lang="en-US" smtClean="0"/>
-              <a:t>6/3/2026</a:t>
+              <a:t>6/8/2026</a:t>
             </a:fld>
             <a:endParaRPr lang="en-US"/>
           </a:p>
@@ -1511,7 +1511,7 @@
           <a:p>
             <a:fld id="{5BCAD085-E8A6-8845-BD4E-CB4CCA059FC4}" type="datetimeFigureOut">
               <a:rPr lang="en-US" smtClean="0"/>
-              <a:t>6/3/2026</a:t>
+              <a:t>6/8/2026</a:t>
             </a:fld>
             <a:endParaRPr lang="en-US"/>
           </a:p>
@@ -1796,7 +1796,7 @@
           <a:p>
             <a:fld id="{5BCAD085-E8A6-8845-BD4E-CB4CCA059FC4}" type="datetimeFigureOut">
               <a:rPr lang="en-US" smtClean="0"/>
-              <a:t>6/3/2026</a:t>
+              <a:t>6/8/2026</a:t>
             </a:fld>
             <a:endParaRPr lang="en-US"/>
           </a:p>
@@ -2215,7 +2215,7 @@
           <a:p>
             <a:fld id="{5BCAD085-E8A6-8845-BD4E-CB4CCA059FC4}" type="datetimeFigureOut">
               <a:rPr lang="en-US" smtClean="0"/>
-              <a:t>6/3/2026</a:t>
+              <a:t>6/8/2026</a:t>
             </a:fld>
             <a:endParaRPr lang="en-US"/>
           </a:p>
@@ -2332,7 +2332,7 @@
           <a:p>
             <a:fld id="{5BCAD085-E8A6-8845-BD4E-CB4CCA059FC4}" type="datetimeFigureOut">
               <a:rPr lang="en-US" smtClean="0"/>
-              <a:t>6/3/2026</a:t>
+              <a:t>6/8/2026</a:t>
             </a:fld>
             <a:endParaRPr lang="en-US"/>
           </a:p>
@@ -2427,7 +2427,7 @@
           <a:p>
             <a:fld id="{5BCAD085-E8A6-8845-BD4E-CB4CCA059FC4}" type="datetimeFigureOut">
               <a:rPr lang="en-US" smtClean="0"/>
-              <a:t>6/3/2026</a:t>
+              <a:t>6/8/2026</a:t>
             </a:fld>
             <a:endParaRPr lang="en-US"/>
           </a:p>
@@ -2702,7 +2702,7 @@
           <a:p>
             <a:fld id="{5BCAD085-E8A6-8845-BD4E-CB4CCA059FC4}" type="datetimeFigureOut">
               <a:rPr lang="en-US" smtClean="0"/>
-              <a:t>6/3/2026</a:t>
+              <a:t>6/8/2026</a:t>
             </a:fld>
             <a:endParaRPr lang="en-US"/>
           </a:p>
@@ -2954,7 +2954,7 @@
           <a:p>
             <a:fld id="{5BCAD085-E8A6-8845-BD4E-CB4CCA059FC4}" type="datetimeFigureOut">
               <a:rPr lang="en-US" smtClean="0"/>
-              <a:t>6/3/2026</a:t>
+              <a:t>6/8/2026</a:t>
             </a:fld>
             <a:endParaRPr lang="en-US"/>
           </a:p>
@@ -3165,7 +3165,7 @@
           <a:p>
             <a:fld id="{5BCAD085-E8A6-8845-BD4E-CB4CCA059FC4}" type="datetimeFigureOut">
               <a:rPr lang="en-US" smtClean="0"/>
-              <a:t>6/3/2026</a:t>
+              <a:t>6/8/2026</a:t>
             </a:fld>
             <a:endParaRPr lang="en-US"/>
           </a:p>
@@ -4864,7 +4864,7 @@
         <p:spPr>
           <a:xfrm>
             <a:off x="1976606" y="1856232"/>
-            <a:ext cx="8238788" cy="3621024"/>
+            <a:ext cx="7853194" cy="3621024"/>
           </a:xfrm>
           <a:prstGeom prst="rect">
             <a:avLst/>
@@ -10417,7 +10417,7 @@
           <a:p>
             <a:pPr algn="l"/>
             <a:r>
-              <a:rPr sz="2000" b="1">
+              <a:rPr sz="2000" b="1" dirty="0" err="1">
                 <a:solidFill>
                   <a:srgbClr val="F7FAFC"/>
                 </a:solidFill>
@@ -10425,6 +10425,12 @@
               </a:rPr>
               <a:t>Антиген</a:t>
             </a:r>
+            <a:endParaRPr sz="2000" b="1" dirty="0">
+              <a:solidFill>
+                <a:srgbClr val="F7FAFC"/>
+              </a:solidFill>
+              <a:latin typeface="Segoe UI"/>
+            </a:endParaRPr>
           </a:p>
         </p:txBody>
       </p:sp>
@@ -10452,13 +10458,40 @@
           <a:p>
             <a:pPr algn="l"/>
             <a:r>
-              <a:rPr sz="1400" b="0">
-                <a:solidFill>
-                  <a:srgbClr val="9FB3C8"/>
-                </a:solidFill>
-                <a:latin typeface="Segoe UI"/>
-              </a:rPr>
-              <a:t>задача: граф + start/target</a:t>
+              <a:rPr sz="1400" b="0" dirty="0" err="1">
+                <a:solidFill>
+                  <a:srgbClr val="9FB3C8"/>
+                </a:solidFill>
+                <a:latin typeface="Segoe UI"/>
+              </a:rPr>
+              <a:t>задача</a:t>
+            </a:r>
+            <a:r>
+              <a:rPr sz="1400" b="0" dirty="0">
+                <a:solidFill>
+                  <a:srgbClr val="9FB3C8"/>
+                </a:solidFill>
+                <a:latin typeface="Segoe UI"/>
+              </a:rPr>
+              <a:t>: </a:t>
+            </a:r>
+            <a:r>
+              <a:rPr sz="1400" b="0" dirty="0" err="1">
+                <a:solidFill>
+                  <a:srgbClr val="9FB3C8"/>
+                </a:solidFill>
+                <a:latin typeface="Segoe UI"/>
+              </a:rPr>
+              <a:t>граф</a:t>
+            </a:r>
+            <a:r>
+              <a:rPr sz="1400" b="0" dirty="0">
+                <a:solidFill>
+                  <a:srgbClr val="9FB3C8"/>
+                </a:solidFill>
+                <a:latin typeface="Segoe UI"/>
+              </a:rPr>
+              <a:t> + start/target</a:t>
             </a:r>
           </a:p>
         </p:txBody>
@@ -10608,7 +10641,7 @@
         <p:spPr>
           <a:xfrm>
             <a:off x="7470648" y="2624328"/>
-            <a:ext cx="3611880" cy="365760"/>
+            <a:ext cx="3611880" cy="307777"/>
           </a:xfrm>
           <a:prstGeom prst="rect">
             <a:avLst/>
@@ -10623,14 +10656,92 @@
           <a:p>
             <a:pPr algn="l"/>
             <a:r>
-              <a:rPr sz="1400" b="0">
-                <a:solidFill>
-                  <a:srgbClr val="9FB3C8"/>
-                </a:solidFill>
-                <a:latin typeface="Segoe UI"/>
-              </a:rPr>
-              <a:t>кандидат: путь от s к t</a:t>
-            </a:r>
+              <a:rPr sz="1400" b="0" dirty="0" err="1">
+                <a:solidFill>
+                  <a:srgbClr val="9FB3C8"/>
+                </a:solidFill>
+                <a:latin typeface="Segoe UI"/>
+              </a:rPr>
+              <a:t>кандидат</a:t>
+            </a:r>
+            <a:r>
+              <a:rPr sz="1400" b="0" dirty="0">
+                <a:solidFill>
+                  <a:srgbClr val="9FB3C8"/>
+                </a:solidFill>
+                <a:latin typeface="Segoe UI"/>
+              </a:rPr>
+              <a:t>: </a:t>
+            </a:r>
+            <a:r>
+              <a:rPr sz="1400" b="0" dirty="0" err="1">
+                <a:solidFill>
+                  <a:srgbClr val="9FB3C8"/>
+                </a:solidFill>
+                <a:latin typeface="Segoe UI"/>
+              </a:rPr>
+              <a:t>путь</a:t>
+            </a:r>
+            <a:r>
+              <a:rPr sz="1400" b="0" dirty="0">
+                <a:solidFill>
+                  <a:srgbClr val="9FB3C8"/>
+                </a:solidFill>
+                <a:latin typeface="Segoe UI"/>
+              </a:rPr>
+              <a:t> </a:t>
+            </a:r>
+            <a:r>
+              <a:rPr sz="1400" b="0" dirty="0" err="1">
+                <a:solidFill>
+                  <a:srgbClr val="9FB3C8"/>
+                </a:solidFill>
+                <a:latin typeface="Segoe UI"/>
+              </a:rPr>
+              <a:t>от</a:t>
+            </a:r>
+            <a:r>
+              <a:rPr sz="1400" b="0" dirty="0">
+                <a:solidFill>
+                  <a:srgbClr val="9FB3C8"/>
+                </a:solidFill>
+                <a:latin typeface="Segoe UI"/>
+              </a:rPr>
+              <a:t> s</a:t>
+            </a:r>
+            <a:r>
+              <a:rPr lang="en-US" sz="1400" dirty="0">
+                <a:solidFill>
+                  <a:srgbClr val="9FB3C8"/>
+                </a:solidFill>
+                <a:latin typeface="Segoe UI"/>
+              </a:rPr>
+              <a:t>tart</a:t>
+            </a:r>
+            <a:r>
+              <a:rPr sz="1400" b="0" dirty="0">
+                <a:solidFill>
+                  <a:srgbClr val="9FB3C8"/>
+                </a:solidFill>
+                <a:latin typeface="Segoe UI"/>
+              </a:rPr>
+              <a:t> к t</a:t>
+            </a:r>
+            <a:r>
+              <a:rPr lang="en-US" sz="1400" b="0" dirty="0">
+                <a:solidFill>
+                  <a:srgbClr val="9FB3C8"/>
+                </a:solidFill>
+                <a:latin typeface="Segoe UI"/>
+              </a:rPr>
+              <a:t>arget</a:t>
+            </a:r>
+            <a:endParaRPr sz="1400" b="0" dirty="0">
+              <a:solidFill>
+                <a:srgbClr val="9FB3C8"/>
+              </a:solidFill>
+              <a:latin typeface="Segoe UI"/>
+            </a:endParaRPr>
           </a:p>
         </p:txBody>
       </p:sp>
@@ -10759,7 +10870,7 @@
           <a:p>
             <a:pPr algn="l"/>
             <a:r>
-              <a:rPr sz="2000" b="1">
+              <a:rPr sz="2000" b="1" dirty="0" err="1">
                 <a:solidFill>
                   <a:srgbClr val="F7FAFC"/>
                 </a:solidFill>
@@ -10767,6 +10878,12 @@
               </a:rPr>
               <a:t>Аффинность</a:t>
             </a:r>
+            <a:endParaRPr sz="2000" b="1" dirty="0">
+              <a:solidFill>
+                <a:srgbClr val="F7FAFC"/>
+              </a:solidFill>
+              <a:latin typeface="Segoe UI"/>
+            </a:endParaRPr>
           </a:p>
         </p:txBody>
       </p:sp>
@@ -10794,14 +10911,92 @@
           <a:p>
             <a:pPr algn="l"/>
             <a:r>
-              <a:rPr sz="1400" b="0">
-                <a:solidFill>
-                  <a:srgbClr val="9FB3C8"/>
-                </a:solidFill>
-                <a:latin typeface="Segoe UI"/>
-              </a:rPr>
-              <a:t>чем короче путь, тем лучше</a:t>
-            </a:r>
+              <a:rPr sz="1400" b="0" dirty="0" err="1">
+                <a:solidFill>
+                  <a:srgbClr val="9FB3C8"/>
+                </a:solidFill>
+                <a:latin typeface="Segoe UI"/>
+              </a:rPr>
+              <a:t>чем</a:t>
+            </a:r>
+            <a:r>
+              <a:rPr sz="1400" b="0" dirty="0">
+                <a:solidFill>
+                  <a:srgbClr val="9FB3C8"/>
+                </a:solidFill>
+                <a:latin typeface="Segoe UI"/>
+              </a:rPr>
+              <a:t> </a:t>
+            </a:r>
+            <a:r>
+              <a:rPr sz="1400" b="0" dirty="0" err="1">
+                <a:solidFill>
+                  <a:srgbClr val="9FB3C8"/>
+                </a:solidFill>
+                <a:latin typeface="Segoe UI"/>
+              </a:rPr>
+              <a:t>короче</a:t>
+            </a:r>
+            <a:r>
+              <a:rPr sz="1400" b="0" dirty="0">
+                <a:solidFill>
+                  <a:srgbClr val="9FB3C8"/>
+                </a:solidFill>
+                <a:latin typeface="Segoe UI"/>
+              </a:rPr>
+              <a:t> </a:t>
+            </a:r>
+            <a:r>
+              <a:rPr sz="1400" b="0" dirty="0" err="1">
+                <a:solidFill>
+                  <a:srgbClr val="9FB3C8"/>
+                </a:solidFill>
+                <a:latin typeface="Segoe UI"/>
+              </a:rPr>
+              <a:t>путь</a:t>
+            </a:r>
+            <a:r>
+              <a:rPr sz="1400" b="0" dirty="0">
+                <a:solidFill>
+                  <a:srgbClr val="9FB3C8"/>
+                </a:solidFill>
+                <a:latin typeface="Segoe UI"/>
+              </a:rPr>
+              <a:t>, </a:t>
+            </a:r>
+            <a:r>
+              <a:rPr sz="1400" b="0" dirty="0" err="1">
+                <a:solidFill>
+                  <a:srgbClr val="9FB3C8"/>
+                </a:solidFill>
+                <a:latin typeface="Segoe UI"/>
+              </a:rPr>
+              <a:t>тем</a:t>
+            </a:r>
+            <a:r>
+              <a:rPr sz="1400" b="0" dirty="0">
+                <a:solidFill>
+                  <a:srgbClr val="9FB3C8"/>
+                </a:solidFill>
+                <a:latin typeface="Segoe UI"/>
+              </a:rPr>
+              <a:t> </a:t>
+            </a:r>
+            <a:r>
+              <a:rPr sz="1400" b="0" dirty="0" err="1">
+                <a:solidFill>
+                  <a:srgbClr val="9FB3C8"/>
+                </a:solidFill>
+                <a:latin typeface="Segoe UI"/>
+              </a:rPr>
+              <a:t>лучше</a:t>
+            </a:r>
+            <a:endParaRPr sz="1400" b="0" dirty="0">
+              <a:solidFill>
+                <a:srgbClr val="9FB3C8"/>
+              </a:solidFill>
+              <a:latin typeface="Segoe UI"/>
+            </a:endParaRPr>
           </a:p>
         </p:txBody>
       </p:sp>
@@ -11270,6 +11465,7 @@
               </a:defRPr>
             </a:pPr>
             <a:r>
+              <a:rPr dirty="0"/>
               <a:t>1</a:t>
             </a:r>
           </a:p>
@@ -11434,6 +11630,7 @@
               </a:defRPr>
             </a:pPr>
             <a:r>
+              <a:rPr dirty="0"/>
               <a:t>2</a:t>
             </a:r>
           </a:p>
@@ -12892,8 +13089,8 @@
         </p:nvSpPr>
         <p:spPr>
           <a:xfrm>
-            <a:off x="2121408" y="2258568"/>
-            <a:ext cx="274320" cy="228600"/>
+            <a:off x="1974486" y="2258568"/>
+            <a:ext cx="714468" cy="261610"/>
           </a:xfrm>
           <a:prstGeom prst="rect">
             <a:avLst/>
@@ -12908,14 +13105,20 @@
           <a:p>
             <a:pPr algn="ctr"/>
             <a:r>
-              <a:rPr sz="1100" b="0">
-                <a:solidFill>
-                  <a:srgbClr val="9FB3C8"/>
-                </a:solidFill>
-                <a:latin typeface="Segoe UI"/>
-              </a:rPr>
-              <a:t>w</a:t>
-            </a:r>
+              <a:rPr lang="en-US" sz="1100" b="0" dirty="0">
+                <a:solidFill>
+                  <a:srgbClr val="9FB3C8"/>
+                </a:solidFill>
+                <a:latin typeface="Segoe UI"/>
+              </a:rPr>
+              <a:t>W = 6</a:t>
+            </a:r>
+            <a:endParaRPr sz="1100" b="0" dirty="0">
+              <a:solidFill>
+                <a:srgbClr val="9FB3C8"/>
+              </a:solidFill>
+              <a:latin typeface="Segoe UI"/>
+            </a:endParaRPr>
           </a:p>
         </p:txBody>
       </p:sp>
@@ -13011,41 +13214,6 @@
       </p:cxnSp>
       <p:sp>
         <p:nvSpPr>
-          <p:cNvPr id="11" name="TextBox 10"/>
-          <p:cNvSpPr txBox="1"/>
-          <p:nvPr/>
-        </p:nvSpPr>
-        <p:spPr>
-          <a:xfrm>
-            <a:off x="4087368" y="2258568"/>
-            <a:ext cx="274320" cy="228600"/>
-          </a:xfrm>
-          <a:prstGeom prst="rect">
-            <a:avLst/>
-          </a:prstGeom>
-          <a:noFill/>
-        </p:spPr>
-        <p:txBody>
-          <a:bodyPr wrap="square" anchor="t">
-            <a:spAutoFit/>
-          </a:bodyPr>
-          <a:lstStyle/>
-          <a:p>
-            <a:pPr algn="ctr"/>
-            <a:r>
-              <a:rPr sz="1100" b="0">
-                <a:solidFill>
-                  <a:srgbClr val="9FB3C8"/>
-                </a:solidFill>
-                <a:latin typeface="Segoe UI"/>
-              </a:rPr>
-              <a:t>w</a:t>
-            </a:r>
-          </a:p>
-        </p:txBody>
-      </p:sp>
-      <p:sp>
-        <p:nvSpPr>
           <p:cNvPr id="12" name="Oval 11"/>
           <p:cNvSpPr/>
           <p:nvPr/>
@@ -13094,6 +13262,7 @@
               </a:defRPr>
             </a:pPr>
             <a:r>
+              <a:rPr dirty="0"/>
               <a:t>13</a:t>
             </a:r>
           </a:p>
@@ -13514,6 +13683,53 @@
               </a:rPr>
               <a:t>06</a:t>
             </a:r>
+          </a:p>
+        </p:txBody>
+      </p:sp>
+      <p:sp>
+        <p:nvSpPr>
+          <p:cNvPr id="24" name="TextBox 23">
+            <a:extLst>
+              <a:ext uri="{FF2B5EF4-FFF2-40B4-BE49-F238E27FC236}">
+                <a16:creationId xmlns:a16="http://schemas.microsoft.com/office/drawing/2014/main" id="{AE4892FC-393B-453C-8766-74C656EC39A0}"/>
+              </a:ext>
+            </a:extLst>
+          </p:cNvPr>
+          <p:cNvSpPr txBox="1"/>
+          <p:nvPr/>
+        </p:nvSpPr>
+        <p:spPr>
+          <a:xfrm>
+            <a:off x="3947161" y="2258568"/>
+            <a:ext cx="714468" cy="261610"/>
+          </a:xfrm>
+          <a:prstGeom prst="rect">
+            <a:avLst/>
+          </a:prstGeom>
+          <a:noFill/>
+        </p:spPr>
+        <p:txBody>
+          <a:bodyPr wrap="square" anchor="t">
+            <a:spAutoFit/>
+          </a:bodyPr>
+          <a:lstStyle/>
+          <a:p>
+            <a:pPr algn="ctr"/>
+            <a:r>
+              <a:rPr lang="en-US" sz="1100" b="0" dirty="0">
+                <a:solidFill>
+                  <a:srgbClr val="9FB3C8"/>
+                </a:solidFill>
+                <a:latin typeface="Segoe UI"/>
+              </a:rPr>
+              <a:t>W = 6</a:t>
+            </a:r>
+            <a:endParaRPr sz="1100" b="0" dirty="0">
+              <a:solidFill>
+                <a:srgbClr val="9FB3C8"/>
+              </a:solidFill>
+              <a:latin typeface="Segoe UI"/>
+            </a:endParaRPr>
           </a:p>
         </p:txBody>
       </p:sp>
@@ -14455,7 +14671,7 @@
                 </a:solidFill>
                 <a:latin typeface="Segoe UI"/>
               </a:rPr>
-              <a:t> · Matplotlib · JSON/CSV </a:t>
+              <a:t> · Matplotlib  </a:t>
             </a:r>
           </a:p>
         </p:txBody>
@@ -15491,7 +15707,7 @@
         <p:spPr>
           <a:xfrm>
             <a:off x="1024128" y="2606040"/>
-            <a:ext cx="4480560" cy="2514600"/>
+            <a:ext cx="4480560" cy="2852063"/>
           </a:xfrm>
           <a:prstGeom prst="rect">
             <a:avLst/>
@@ -15515,9 +15731,33 @@
                 <a:latin typeface="Segoe UI"/>
               </a:defRPr>
             </a:pPr>
-            <a:r>
-              <a:t>Время выполнения</a:t>
-            </a:r>
+            <a:endParaRPr lang="en-US" dirty="0"/>
+          </a:p>
+          <a:p>
+            <a:pPr>
+              <a:spcAft>
+                <a:spcPts val="800"/>
+              </a:spcAft>
+              <a:defRPr sz="1400" b="1">
+                <a:solidFill>
+                  <a:srgbClr val="00D5FF"/>
+                </a:solidFill>
+                <a:latin typeface="Segoe UI"/>
+              </a:defRPr>
+            </a:pPr>
+            <a:r>
+              <a:rPr dirty="0" err="1"/>
+              <a:t>Время</a:t>
+            </a:r>
+            <a:r>
+              <a:rPr dirty="0"/>
+              <a:t> </a:t>
+            </a:r>
+            <a:r>
+              <a:rPr dirty="0" err="1"/>
+              <a:t>выполнения</a:t>
+            </a:r>
+            <a:endParaRPr dirty="0"/>
           </a:p>
           <a:p>
             <a:pPr>
@@ -15532,8 +15772,50 @@
               </a:defRPr>
             </a:pPr>
             <a:r>
-              <a:t>как растёт время при увеличении графа</a:t>
-            </a:r>
+              <a:rPr dirty="0" err="1"/>
+              <a:t>как</a:t>
+            </a:r>
+            <a:r>
+              <a:rPr dirty="0"/>
+              <a:t> </a:t>
+            </a:r>
+            <a:r>
+              <a:rPr dirty="0" err="1"/>
+              <a:t>растёт</a:t>
+            </a:r>
+            <a:r>
+              <a:rPr dirty="0"/>
+              <a:t> </a:t>
+            </a:r>
+            <a:r>
+              <a:rPr dirty="0" err="1"/>
+              <a:t>время</a:t>
+            </a:r>
+            <a:r>
+              <a:rPr dirty="0"/>
+              <a:t> </a:t>
+            </a:r>
+            <a:r>
+              <a:rPr dirty="0" err="1"/>
+              <a:t>при</a:t>
+            </a:r>
+            <a:r>
+              <a:rPr dirty="0"/>
+              <a:t> </a:t>
+            </a:r>
+            <a:r>
+              <a:rPr dirty="0" err="1"/>
+              <a:t>увеличении</a:t>
+            </a:r>
+            <a:r>
+              <a:rPr dirty="0"/>
+              <a:t> </a:t>
+            </a:r>
+            <a:r>
+              <a:rPr dirty="0" err="1"/>
+              <a:t>графа</a:t>
+            </a:r>
+            <a:endParaRPr dirty="0"/>
           </a:p>
           <a:p>
             <a:pPr>
@@ -15547,9 +15829,33 @@
                 <a:latin typeface="Segoe UI"/>
               </a:defRPr>
             </a:pPr>
-            <a:r>
-              <a:t>Качество решения</a:t>
-            </a:r>
+            <a:endParaRPr lang="en-US" dirty="0"/>
+          </a:p>
+          <a:p>
+            <a:pPr>
+              <a:spcAft>
+                <a:spcPts val="800"/>
+              </a:spcAft>
+              <a:defRPr sz="1400" b="1">
+                <a:solidFill>
+                  <a:srgbClr val="46F0C2"/>
+                </a:solidFill>
+                <a:latin typeface="Segoe UI"/>
+              </a:defRPr>
+            </a:pPr>
+            <a:r>
+              <a:rPr dirty="0" err="1"/>
+              <a:t>Качество</a:t>
+            </a:r>
+            <a:r>
+              <a:rPr dirty="0"/>
+              <a:t> </a:t>
+            </a:r>
+            <a:r>
+              <a:rPr dirty="0" err="1"/>
+              <a:t>решения</a:t>
+            </a:r>
+            <a:endParaRPr dirty="0"/>
           </a:p>
           <a:p>
             <a:pPr>
@@ -15564,8 +15870,42 @@
               </a:defRPr>
             </a:pPr>
             <a:r>
-              <a:t>длина пути и отклонение от Дейкстры</a:t>
-            </a:r>
+              <a:rPr dirty="0" err="1"/>
+              <a:t>длина</a:t>
+            </a:r>
+            <a:r>
+              <a:rPr dirty="0"/>
+              <a:t> </a:t>
+            </a:r>
+            <a:r>
+              <a:rPr dirty="0" err="1"/>
+              <a:t>пути</a:t>
+            </a:r>
+            <a:r>
+              <a:rPr dirty="0"/>
+              <a:t> и </a:t>
+            </a:r>
+            <a:r>
+              <a:rPr dirty="0" err="1"/>
+              <a:t>отклонение</a:t>
+            </a:r>
+            <a:r>
+              <a:rPr dirty="0"/>
+              <a:t> </a:t>
+            </a:r>
+            <a:r>
+              <a:rPr dirty="0" err="1"/>
+              <a:t>от</a:t>
+            </a:r>
+            <a:r>
+              <a:rPr dirty="0"/>
+              <a:t> </a:t>
+            </a:r>
+            <a:r>
+              <a:rPr dirty="0" err="1"/>
+              <a:t>Дейкстры</a:t>
+            </a:r>
+            <a:endParaRPr dirty="0"/>
           </a:p>
           <a:p>
             <a:pPr>
@@ -15579,9 +15919,25 @@
                 <a:latin typeface="Segoe UI"/>
               </a:defRPr>
             </a:pPr>
-            <a:r>
+            <a:endParaRPr lang="en-US" dirty="0"/>
+          </a:p>
+          <a:p>
+            <a:pPr>
+              <a:spcAft>
+                <a:spcPts val="800"/>
+              </a:spcAft>
+              <a:defRPr sz="1400" b="1">
+                <a:solidFill>
+                  <a:srgbClr val="8B5CF6"/>
+                </a:solidFill>
+                <a:latin typeface="Segoe UI"/>
+              </a:defRPr>
+            </a:pPr>
+            <a:r>
+              <a:rPr dirty="0" err="1"/>
               <a:t>Сходимость</a:t>
             </a:r>
+            <a:endParaRPr dirty="0"/>
           </a:p>
           <a:p>
             <a:pPr>
@@ -15596,8 +15952,42 @@
               </a:defRPr>
             </a:pPr>
             <a:r>
-              <a:t>значение целевой функции по итерациям</a:t>
-            </a:r>
+              <a:rPr dirty="0" err="1"/>
+              <a:t>значение</a:t>
+            </a:r>
+            <a:r>
+              <a:rPr dirty="0"/>
+              <a:t> </a:t>
+            </a:r>
+            <a:r>
+              <a:rPr dirty="0" err="1"/>
+              <a:t>целевой</a:t>
+            </a:r>
+            <a:r>
+              <a:rPr dirty="0"/>
+              <a:t> </a:t>
+            </a:r>
+            <a:r>
+              <a:rPr dirty="0" err="1"/>
+              <a:t>функции</a:t>
+            </a:r>
+            <a:r>
+              <a:rPr dirty="0"/>
+              <a:t> </a:t>
+            </a:r>
+            <a:r>
+              <a:rPr dirty="0" err="1"/>
+              <a:t>по</a:t>
+            </a:r>
+            <a:r>
+              <a:rPr dirty="0"/>
+              <a:t> </a:t>
+            </a:r>
+            <a:r>
+              <a:rPr dirty="0" err="1"/>
+              <a:t>итерациям</a:t>
+            </a:r>
+            <a:endParaRPr dirty="0"/>
           </a:p>
         </p:txBody>
       </p:sp>
